--- a/dist/초4/영어/소리낱말문장/초4_영어_소리낱말문장_01_단모음소리_학생용.pptx
+++ b/dist/초4/영어/소리낱말문장/초4_영어_소리낱말문장_01_단모음소리_학생용.pptx
@@ -123,13 +123,13 @@
   <p:extLst>
     <p:ext uri="{521415D9-36F7-43E2-AB2F-B90AF26B5E84}">
       <p14:sectionLst xmlns:p14="http://schemas.microsoft.com/office/powerpoint/2010/main">
-        <p14:section name="도입" id="{1134292c-d863-fdb5-6962-a60b47b765d7}">
+        <p14:section name="도입" id="{3496ab22-344f-2bc7-9f90-80dd524ae63f}">
           <p14:sldIdLst>
             <p14:sldId id="256"/>
             <p14:sldId id="257"/>
           </p14:sldIdLst>
         </p14:section>
-        <p14:section name="개념" id="{87014434-1dcb-6feb-8e44-6fb756d2cd08}">
+        <p14:section name="개념" id="{46dea5d5-1c0b-43a9-eafc-6336ff459d7a}">
           <p14:sldIdLst>
             <p14:sldId id="258"/>
             <p14:sldId id="259"/>
@@ -140,7 +140,7 @@
             <p14:sldId id="265"/>
           </p14:sldIdLst>
         </p14:section>
-        <p14:section name="연습" id="{34b43af7-a925-c6ee-178c-abac3036eff1}">
+        <p14:section name="연습" id="{f9a4fa23-c614-065c-5c05-4b27efc25cb8}">
           <p14:sldIdLst>
             <p14:sldId id="264"/>
             <p14:sldId id="266"/>
@@ -148,24 +148,24 @@
             <p14:sldId id="268"/>
           </p14:sldIdLst>
         </p14:section>
-        <p14:section name="개념" id="{dc876993-1a34-0537-2fc4-b72d57aeb98f}">
+        <p14:section name="개념" id="{38fe0719-008e-69cd-bc90-c79dfc1a172e}">
           <p14:sldIdLst/>
         </p14:section>
-        <p14:section name="연습" id="{92702dc5-9852-9e60-f990-dff83383b52f}">
+        <p14:section name="연습" id="{dda4c538-e951-acd4-b248-07b51d6a9083}">
           <p14:sldIdLst/>
         </p14:section>
-        <p14:section name="확인" id="{bfe01a07-c783-b121-a9ff-36e83f390192}">
+        <p14:section name="확인" id="{96fd6753-cc4b-170b-7e93-fe1ab954a711}">
           <p14:sldIdLst>
             <p14:sldId id="269"/>
             <p14:sldId id="270"/>
           </p14:sldIdLst>
         </p14:section>
-        <p14:section name="정리" id="{0dfaba6d-4169-eacb-a8bc-14ec7d3f7fee}">
+        <p14:section name="정리" id="{5a792358-2816-54d6-8e2e-b42ae103dd9c}">
           <p14:sldIdLst>
             <p14:sldId id="271"/>
           </p14:sldIdLst>
         </p14:section>
-        <p14:section name="보충" id="{93bbe19e-f511-0a34-adb9-1328ac201889}">
+        <p14:section name="보충" id="{9549f61e-6e38-7724-d02b-ba2f2b861742}">
           <p14:sldIdLst>
             <p14:sldId id="272"/>
           </p14:sldIdLst>

--- a/dist/초4/영어/소리낱말문장/초4_영어_소리낱말문장_01_단모음소리_학생용.pptx
+++ b/dist/초4/영어/소리낱말문장/초4_영어_소리낱말문장_01_단모음소리_학생용.pptx
@@ -123,13 +123,13 @@
   <p:extLst>
     <p:ext uri="{521415D9-36F7-43E2-AB2F-B90AF26B5E84}">
       <p14:sectionLst xmlns:p14="http://schemas.microsoft.com/office/powerpoint/2010/main">
-        <p14:section name="도입" id="{3496ab22-344f-2bc7-9f90-80dd524ae63f}">
+        <p14:section name="도입" id="{e61ba89c-09da-3483-c859-74dd90f65072}">
           <p14:sldIdLst>
             <p14:sldId id="256"/>
             <p14:sldId id="257"/>
           </p14:sldIdLst>
         </p14:section>
-        <p14:section name="개념" id="{46dea5d5-1c0b-43a9-eafc-6336ff459d7a}">
+        <p14:section name="개념" id="{663ed161-fad8-11f0-339a-15ca590b4752}">
           <p14:sldIdLst>
             <p14:sldId id="258"/>
             <p14:sldId id="259"/>
@@ -140,7 +140,7 @@
             <p14:sldId id="265"/>
           </p14:sldIdLst>
         </p14:section>
-        <p14:section name="연습" id="{f9a4fa23-c614-065c-5c05-4b27efc25cb8}">
+        <p14:section name="연습" id="{be10d929-8b24-9ac5-59dc-f4cde8c7c386}">
           <p14:sldIdLst>
             <p14:sldId id="264"/>
             <p14:sldId id="266"/>
@@ -148,24 +148,24 @@
             <p14:sldId id="268"/>
           </p14:sldIdLst>
         </p14:section>
-        <p14:section name="개념" id="{38fe0719-008e-69cd-bc90-c79dfc1a172e}">
+        <p14:section name="개념" id="{fabcd804-72c9-4b23-60db-eec82c342da5}">
           <p14:sldIdLst/>
         </p14:section>
-        <p14:section name="연습" id="{dda4c538-e951-acd4-b248-07b51d6a9083}">
+        <p14:section name="연습" id="{9d91de53-0df6-11e2-602f-c910909c1074}">
           <p14:sldIdLst/>
         </p14:section>
-        <p14:section name="확인" id="{96fd6753-cc4b-170b-7e93-fe1ab954a711}">
+        <p14:section name="확인" id="{bbbb0779-3a90-2a23-766d-5cbb30a198a5}">
           <p14:sldIdLst>
             <p14:sldId id="269"/>
             <p14:sldId id="270"/>
           </p14:sldIdLst>
         </p14:section>
-        <p14:section name="정리" id="{5a792358-2816-54d6-8e2e-b42ae103dd9c}">
+        <p14:section name="정리" id="{dbbcd952-77d3-1b56-9251-3c2c35e315a2}">
           <p14:sldIdLst>
             <p14:sldId id="271"/>
           </p14:sldIdLst>
         </p14:section>
-        <p14:section name="보충" id="{9549f61e-6e38-7724-d02b-ba2f2b861742}">
+        <p14:section name="보충" id="{a294dc8b-b784-6ddf-f719-e349ad4ef842}">
           <p14:sldIdLst>
             <p14:sldId id="272"/>
           </p14:sldIdLst>

--- a/dist/초4/영어/소리낱말문장/초4_영어_소리낱말문장_01_단모음소리_학생용.pptx
+++ b/dist/초4/영어/소리낱말문장/초4_영어_소리낱말문장_01_단모음소리_학생용.pptx
@@ -123,13 +123,13 @@
   <p:extLst>
     <p:ext uri="{521415D9-36F7-43E2-AB2F-B90AF26B5E84}">
       <p14:sectionLst xmlns:p14="http://schemas.microsoft.com/office/powerpoint/2010/main">
-        <p14:section name="도입" id="{e61ba89c-09da-3483-c859-74dd90f65072}">
+        <p14:section name="도입" id="{f182fc5b-7bb5-b301-1e61-1e35278b9707}">
           <p14:sldIdLst>
             <p14:sldId id="256"/>
             <p14:sldId id="257"/>
           </p14:sldIdLst>
         </p14:section>
-        <p14:section name="개념" id="{663ed161-fad8-11f0-339a-15ca590b4752}">
+        <p14:section name="개념" id="{fc013ae7-3c64-78ef-3704-510d9f3504b0}">
           <p14:sldIdLst>
             <p14:sldId id="258"/>
             <p14:sldId id="259"/>
@@ -140,7 +140,7 @@
             <p14:sldId id="265"/>
           </p14:sldIdLst>
         </p14:section>
-        <p14:section name="연습" id="{be10d929-8b24-9ac5-59dc-f4cde8c7c386}">
+        <p14:section name="연습" id="{9a5197ac-c601-ad34-91b2-41868b4d942a}">
           <p14:sldIdLst>
             <p14:sldId id="264"/>
             <p14:sldId id="266"/>
@@ -148,24 +148,24 @@
             <p14:sldId id="268"/>
           </p14:sldIdLst>
         </p14:section>
-        <p14:section name="개념" id="{fabcd804-72c9-4b23-60db-eec82c342da5}">
+        <p14:section name="개념" id="{90127e42-7404-2338-50d8-5dbe20f5c733}">
           <p14:sldIdLst/>
         </p14:section>
-        <p14:section name="연습" id="{9d91de53-0df6-11e2-602f-c910909c1074}">
+        <p14:section name="연습" id="{bf447201-c1d1-75d3-5f48-0482fe17139e}">
           <p14:sldIdLst/>
         </p14:section>
-        <p14:section name="확인" id="{bbbb0779-3a90-2a23-766d-5cbb30a198a5}">
+        <p14:section name="확인" id="{4c360a3a-4f8b-bfdf-93bd-1b0cdc9be436}">
           <p14:sldIdLst>
             <p14:sldId id="269"/>
             <p14:sldId id="270"/>
           </p14:sldIdLst>
         </p14:section>
-        <p14:section name="정리" id="{dbbcd952-77d3-1b56-9251-3c2c35e315a2}">
+        <p14:section name="정리" id="{8ec46afc-ec62-884f-38e1-df4ef0572db7}">
           <p14:sldIdLst>
             <p14:sldId id="271"/>
           </p14:sldIdLst>
         </p14:section>
-        <p14:section name="보충" id="{a294dc8b-b784-6ddf-f719-e349ad4ef842}">
+        <p14:section name="보충" id="{1e42c0de-a51e-81d5-a055-e3843e2d2f6c}">
           <p14:sldIdLst>
             <p14:sldId id="272"/>
           </p14:sldIdLst>
